--- a/lecons/LSA/Climatology/LSA_CLIM_L08_Vertical_Distribution_of_Temperature.pptx
+++ b/lecons/LSA/Climatology/LSA_CLIM_L08_Vertical_Distribution_of_Temperature.pptx
@@ -2930,7 +2930,7 @@
           <a:p>
             <a:r>
               <a:rPr lang="en-US" dirty="0"/>
-              <a:t>Let us copy DEFINITIONS. The key terms of this lesson are defined as follows. Write each point on a new line, with the key term first. When you finish, we go to the next slide.</a:t>
+              <a:t>Let us copy the definitions. The key terms of this lesson are defined as follows. On this slide we have Lapse rate. Write each point on a new line, with the key term first, and explain it in your own words when we revise. When you finish, we go to the next slide.</a:t>
             </a:r>
             <a:endParaRPr lang="en-US" dirty="0"/>
           </a:p>
@@ -3018,7 +3018,7 @@
           <a:p>
             <a:r>
               <a:rPr lang="en-US" dirty="0"/>
-              <a:t>We continue with the same part. Write each point on a new line, with the key term first.</a:t>
+              <a:t>We continue with the definitions. On this slide we have Adiabatic change. Write each point on a new line, with the key term first, and explain it in your own words when we revise.</a:t>
             </a:r>
             <a:endParaRPr lang="en-US" dirty="0"/>
           </a:p>
@@ -3106,7 +3106,7 @@
           <a:p>
             <a:r>
               <a:rPr lang="en-US" dirty="0"/>
-              <a:t>Let us copy Nature of the Variation of Temperature with Height. In the troposphere, temperature changes with height as follows. Write each point on a new line, with the key term first. When you finish, we go to the next slide.</a:t>
+              <a:t>Let us copy Nature of the Variation of Temperature with Height. In the troposphere, temperature changes with height as follows. On this slide we have Environmental lapse rate. Write each point on a new line, with the key term first, and explain it in your own words when we revise. When you finish, we go to the next slide.</a:t>
             </a:r>
             <a:endParaRPr lang="en-US" dirty="0"/>
           </a:p>
@@ -3194,7 +3194,7 @@
           <a:p>
             <a:r>
               <a:rPr lang="en-US" dirty="0"/>
-              <a:t>We continue with the same part. Write each point on a new line, with the key term first.</a:t>
+              <a:t>We continue with Nature of the Variation of Temperature with Height. On this slide we have Variations. Write each point on a new line, with the key term first, and explain it in your own words when we revise.</a:t>
             </a:r>
             <a:endParaRPr lang="en-US" dirty="0"/>
           </a:p>
@@ -3370,7 +3370,7 @@
           <a:p>
             <a:r>
               <a:rPr lang="en-US" dirty="0"/>
-              <a:t>Let us copy Reasons for the Lapsing of Temperature. Temperature falls with height for the following reasons. Write each point on a new line, with the key term first. When you finish, we go to the next slide.</a:t>
+              <a:t>Let us copy Reasons for the Lapsing of Temperature. Temperature falls with height for the following reasons. On this slide we have Heating from below. Write each point on a new line, with the key term first, and explain it in your own words when we revise. When you finish, we go to the next slide.</a:t>
             </a:r>
             <a:endParaRPr lang="en-US" dirty="0"/>
           </a:p>
@@ -3546,7 +3546,7 @@
           <a:p>
             <a:r>
               <a:rPr lang="en-US" dirty="0"/>
-              <a:t>We continue with the same part. Write each point on a new line, with the key term first.</a:t>
+              <a:t>We continue with Reasons for the Lapsing of Temperature. On this slide we have Thin air at altitude and Adiabatic cooling. Write each point on a new line, with the key term first, and explain it in your own words when we revise.</a:t>
             </a:r>
             <a:endParaRPr lang="en-US" dirty="0"/>
           </a:p>
@@ -4866,7 +4866,7 @@
           <a:p>
             <a:r>
               <a:rPr lang="en-US" dirty="0"/>
-              <a:t>Here is the plan of our lesson today. We shall correction of the homework; then objectives and recall; then real-life situation and action to take; then learning activities; then board summary; then evaluation, remediation and homework.</a:t>
+              <a:t>Here is the plan of our lesson today. First, we shall correct the homework. Then we shall look at the objectives and recall what you already know. After that, we shall study a situation from real life and the action to take, and do the learning activities. Finally, we shall copy the board summary, do the evaluation and the remediation, and I will give you the homework.</a:t>
             </a:r>
             <a:endParaRPr lang="en-US" dirty="0"/>
           </a:p>
@@ -6406,7 +6406,7 @@
                 <a:ea typeface="Times New Roman" pitchFamily="34" charset="-122"/>
                 <a:cs typeface="Times New Roman" pitchFamily="34" charset="-120"/>
               </a:rPr>
-              <a:t>Lesson 8: Vertical Distribution of Temperature</a:t>
+              <a:t>Lesson 8</a:t>
             </a:r>
             <a:endParaRPr lang="en-US" sz="2600" dirty="0"/>
           </a:p>
